--- a/presentations/b13-ticket-to-machine/B13_Ticket_to_Machine_Narrated.pptx
+++ b/presentations/b13-ticket-to-machine/B13_Ticket_to_Machine_Narrated.pptx
@@ -197,7 +197,7 @@
     </p:spTree>
     <p:extLst>
       <p:ext uri="{BB962C8B-B14F-4D97-AF65-F5344CB8AC3E}">
-        <p14:creationId xmlns:p14="http://schemas.microsoft.com/office/powerpoint/2010/main" val="1500223786"/>
+        <p14:creationId xmlns:p14="http://schemas.microsoft.com/office/powerpoint/2010/main" val="3017287334"/>
       </p:ext>
     </p:extLst>
   </p:cSld>
@@ -2752,7 +2752,7 @@
             <a:hlinkClick r:id="" action="ppaction://media"/>
             <a:extLst>
               <a:ext uri="{FF2B5EF4-FFF2-40B4-BE49-F238E27FC236}">
-                <a16:creationId xmlns:a16="http://schemas.microsoft.com/office/drawing/2014/main" id="{0D7533C1-1106-3F9A-7035-B35CF617CE4C}"/>
+                <a16:creationId xmlns:a16="http://schemas.microsoft.com/office/drawing/2014/main" id="{F0A5B7BD-7F0D-5091-67EC-9338F6FCD3DA}"/>
               </a:ext>
             </a:extLst>
           </p:cNvPr>
@@ -2768,7 +2768,7 @@
                     <p:ext uri="{3AFAAA56-56D3-431D-BCD4-E75A35582382}">
                       <p173:tracksInfo xmlns:p173="http://schemas.microsoft.com/office/powerpoint/2017/3/main" displayLoc="slide">
                         <p173:trackLst>
-                          <p173:track id="{0BA7CDA3-DEA2-4C28-BB94-2CD6F3835704}" label="English (captions)" lang="en-US" r:embed="rId6"/>
+                          <p173:track id="{641A2A61-8335-4F5F-BD56-B1FEA4A39690}" label="English (captions)" lang="en-US" r:embed="rId6"/>
                         </p173:trackLst>
                       </p173:tracksInfo>
                     </p:ext>
@@ -2786,7 +2786,7 @@
         </p:blipFill>
         <p:spPr>
           <a:xfrm>
-            <a:off x="127000" y="6350000"/>
+            <a:off x="12446000" y="127000"/>
             <a:ext cx="304800" cy="304800"/>
           </a:xfrm>
           <a:prstGeom prst="rect">
@@ -4711,7 +4711,7 @@
             <a:hlinkClick r:id="" action="ppaction://media"/>
             <a:extLst>
               <a:ext uri="{FF2B5EF4-FFF2-40B4-BE49-F238E27FC236}">
-                <a16:creationId xmlns:a16="http://schemas.microsoft.com/office/drawing/2014/main" id="{F4604575-110A-3F1C-0605-B56E78D648C2}"/>
+                <a16:creationId xmlns:a16="http://schemas.microsoft.com/office/drawing/2014/main" id="{204D1148-FB7D-9C03-58A7-EE2CD8DEE6C4}"/>
               </a:ext>
             </a:extLst>
           </p:cNvPr>
@@ -4727,7 +4727,7 @@
                     <p:ext uri="{3AFAAA56-56D3-431D-BCD4-E75A35582382}">
                       <p173:tracksInfo xmlns:p173="http://schemas.microsoft.com/office/powerpoint/2017/3/main" displayLoc="slide">
                         <p173:trackLst>
-                          <p173:track id="{36817C29-8456-4BCB-9A86-CA069B25676B}" label="English (captions)" lang="en-US" r:embed="rId6"/>
+                          <p173:track id="{124F819B-350D-4309-8092-4F3BD0AA4F68}" label="English (captions)" lang="en-US" r:embed="rId6"/>
                         </p173:trackLst>
                       </p173:tracksInfo>
                     </p:ext>
@@ -4745,7 +4745,7 @@
         </p:blipFill>
         <p:spPr>
           <a:xfrm>
-            <a:off x="127000" y="6350000"/>
+            <a:off x="12446000" y="127000"/>
             <a:ext cx="304800" cy="304800"/>
           </a:xfrm>
           <a:prstGeom prst="rect">
@@ -7486,7 +7486,7 @@
             <a:hlinkClick r:id="" action="ppaction://media"/>
             <a:extLst>
               <a:ext uri="{FF2B5EF4-FFF2-40B4-BE49-F238E27FC236}">
-                <a16:creationId xmlns:a16="http://schemas.microsoft.com/office/drawing/2014/main" id="{E020FAE0-A77E-1AF9-8177-37115E90D4EC}"/>
+                <a16:creationId xmlns:a16="http://schemas.microsoft.com/office/drawing/2014/main" id="{3FBD2E5E-9A54-C344-1501-DFECAE89A4E5}"/>
               </a:ext>
             </a:extLst>
           </p:cNvPr>
@@ -7502,7 +7502,7 @@
                     <p:ext uri="{3AFAAA56-56D3-431D-BCD4-E75A35582382}">
                       <p173:tracksInfo xmlns:p173="http://schemas.microsoft.com/office/powerpoint/2017/3/main" displayLoc="slide">
                         <p173:trackLst>
-                          <p173:track id="{D137CD89-FBDA-46B9-91CC-7F14CAAAB985}" label="English (captions)" lang="en-US" r:embed="rId7"/>
+                          <p173:track id="{2EE38A71-9A40-413D-AE0A-126E273C5576}" label="English (captions)" lang="en-US" r:embed="rId7"/>
                         </p173:trackLst>
                       </p173:tracksInfo>
                     </p:ext>
@@ -7520,7 +7520,7 @@
         </p:blipFill>
         <p:spPr>
           <a:xfrm>
-            <a:off x="127000" y="6350000"/>
+            <a:off x="12446000" y="127000"/>
             <a:ext cx="304800" cy="304800"/>
           </a:xfrm>
           <a:prstGeom prst="rect">
@@ -8322,7 +8322,7 @@
             <a:hlinkClick r:id="" action="ppaction://media"/>
             <a:extLst>
               <a:ext uri="{FF2B5EF4-FFF2-40B4-BE49-F238E27FC236}">
-                <a16:creationId xmlns:a16="http://schemas.microsoft.com/office/drawing/2014/main" id="{05C22D3A-F2E8-0F06-7631-7AA615AFE895}"/>
+                <a16:creationId xmlns:a16="http://schemas.microsoft.com/office/drawing/2014/main" id="{9EA73C8E-54EA-BDF9-CBA2-DAD124207D74}"/>
               </a:ext>
             </a:extLst>
           </p:cNvPr>
@@ -8338,7 +8338,7 @@
                     <p:ext uri="{3AFAAA56-56D3-431D-BCD4-E75A35582382}">
                       <p173:tracksInfo xmlns:p173="http://schemas.microsoft.com/office/powerpoint/2017/3/main" displayLoc="slide">
                         <p173:trackLst>
-                          <p173:track id="{0AD2DAF7-55A8-47C0-B873-FDEF49D8A230}" label="English (captions)" lang="en-US" r:embed="rId6"/>
+                          <p173:track id="{D18002F1-963C-4B8C-A4F1-31CFC8A2DBC8}" label="English (captions)" lang="en-US" r:embed="rId6"/>
                         </p173:trackLst>
                       </p173:tracksInfo>
                     </p:ext>
@@ -8356,7 +8356,7 @@
         </p:blipFill>
         <p:spPr>
           <a:xfrm>
-            <a:off x="127000" y="6350000"/>
+            <a:off x="12446000" y="127000"/>
             <a:ext cx="304800" cy="304800"/>
           </a:xfrm>
           <a:prstGeom prst="rect">
@@ -9227,7 +9227,7 @@
             <a:hlinkClick r:id="" action="ppaction://media"/>
             <a:extLst>
               <a:ext uri="{FF2B5EF4-FFF2-40B4-BE49-F238E27FC236}">
-                <a16:creationId xmlns:a16="http://schemas.microsoft.com/office/drawing/2014/main" id="{242E703A-7FD9-EEED-D2A1-6FF5EF9421F9}"/>
+                <a16:creationId xmlns:a16="http://schemas.microsoft.com/office/drawing/2014/main" id="{128112B8-7561-D638-C9DA-AC7CB21DEBF1}"/>
               </a:ext>
             </a:extLst>
           </p:cNvPr>
@@ -9243,7 +9243,7 @@
                     <p:ext uri="{3AFAAA56-56D3-431D-BCD4-E75A35582382}">
                       <p173:tracksInfo xmlns:p173="http://schemas.microsoft.com/office/powerpoint/2017/3/main" displayLoc="slide">
                         <p173:trackLst>
-                          <p173:track id="{69229742-7882-4C25-A3F5-A73C92E5DCF9}" label="English (captions)" lang="en-US" r:embed="rId7"/>
+                          <p173:track id="{178BD8FB-6C64-445E-9C0B-97C779E70C93}" label="English (captions)" lang="en-US" r:embed="rId7"/>
                         </p173:trackLst>
                       </p173:tracksInfo>
                     </p:ext>
@@ -9261,7 +9261,7 @@
         </p:blipFill>
         <p:spPr>
           <a:xfrm>
-            <a:off x="127000" y="6350000"/>
+            <a:off x="12446000" y="127000"/>
             <a:ext cx="304800" cy="304800"/>
           </a:xfrm>
           <a:prstGeom prst="rect">
@@ -10388,7 +10388,7 @@
             <a:hlinkClick r:id="" action="ppaction://media"/>
             <a:extLst>
               <a:ext uri="{FF2B5EF4-FFF2-40B4-BE49-F238E27FC236}">
-                <a16:creationId xmlns:a16="http://schemas.microsoft.com/office/drawing/2014/main" id="{D3443883-4ABC-E434-CB66-6CF1CDEC9B01}"/>
+                <a16:creationId xmlns:a16="http://schemas.microsoft.com/office/drawing/2014/main" id="{378D2058-4CC2-2AE2-AA75-32B3136EAB31}"/>
               </a:ext>
             </a:extLst>
           </p:cNvPr>
@@ -10404,7 +10404,7 @@
                     <p:ext uri="{3AFAAA56-56D3-431D-BCD4-E75A35582382}">
                       <p173:tracksInfo xmlns:p173="http://schemas.microsoft.com/office/powerpoint/2017/3/main" displayLoc="slide">
                         <p173:trackLst>
-                          <p173:track id="{5F9E68A5-86D6-4D57-B989-911D76D6CCD7}" label="English (captions)" lang="en-US" r:embed="rId7"/>
+                          <p173:track id="{311DA7C1-6845-4A19-B1C5-1A3B2B77424C}" label="English (captions)" lang="en-US" r:embed="rId7"/>
                         </p173:trackLst>
                       </p173:tracksInfo>
                     </p:ext>
@@ -10422,7 +10422,7 @@
         </p:blipFill>
         <p:spPr>
           <a:xfrm>
-            <a:off x="127000" y="6350000"/>
+            <a:off x="12446000" y="127000"/>
             <a:ext cx="304800" cy="304800"/>
           </a:xfrm>
           <a:prstGeom prst="rect">
@@ -11812,7 +11812,7 @@
             <a:hlinkClick r:id="" action="ppaction://media"/>
             <a:extLst>
               <a:ext uri="{FF2B5EF4-FFF2-40B4-BE49-F238E27FC236}">
-                <a16:creationId xmlns:a16="http://schemas.microsoft.com/office/drawing/2014/main" id="{935FD710-EAF8-9F9B-FA5D-785CE2F1C480}"/>
+                <a16:creationId xmlns:a16="http://schemas.microsoft.com/office/drawing/2014/main" id="{839FA22D-07CE-1717-DB82-1B53B82ECC21}"/>
               </a:ext>
             </a:extLst>
           </p:cNvPr>
@@ -11828,7 +11828,7 @@
                     <p:ext uri="{3AFAAA56-56D3-431D-BCD4-E75A35582382}">
                       <p173:tracksInfo xmlns:p173="http://schemas.microsoft.com/office/powerpoint/2017/3/main" displayLoc="slide">
                         <p173:trackLst>
-                          <p173:track id="{A2AFA117-6490-4587-B363-545627F03368}" label="English (captions)" lang="en-US" r:embed="rId7"/>
+                          <p173:track id="{CE8C3CC3-7760-46F9-B7FE-D9F7C573F4BA}" label="English (captions)" lang="en-US" r:embed="rId7"/>
                         </p173:trackLst>
                       </p173:tracksInfo>
                     </p:ext>
@@ -11846,7 +11846,7 @@
         </p:blipFill>
         <p:spPr>
           <a:xfrm>
-            <a:off x="127000" y="6350000"/>
+            <a:off x="12446000" y="127000"/>
             <a:ext cx="304800" cy="304800"/>
           </a:xfrm>
           <a:prstGeom prst="rect">
@@ -13825,7 +13825,7 @@
             <a:hlinkClick r:id="" action="ppaction://media"/>
             <a:extLst>
               <a:ext uri="{FF2B5EF4-FFF2-40B4-BE49-F238E27FC236}">
-                <a16:creationId xmlns:a16="http://schemas.microsoft.com/office/drawing/2014/main" id="{F2EDFA22-2119-17CD-A2DA-56D0F3E70E24}"/>
+                <a16:creationId xmlns:a16="http://schemas.microsoft.com/office/drawing/2014/main" id="{51742150-972A-603D-A763-34016A994E02}"/>
               </a:ext>
             </a:extLst>
           </p:cNvPr>
@@ -13841,7 +13841,7 @@
                     <p:ext uri="{3AFAAA56-56D3-431D-BCD4-E75A35582382}">
                       <p173:tracksInfo xmlns:p173="http://schemas.microsoft.com/office/powerpoint/2017/3/main" displayLoc="slide">
                         <p173:trackLst>
-                          <p173:track id="{8B22B1C0-3C08-490F-B91A-01A80E7AE669}" label="English (captions)" lang="en-US" r:embed="rId7"/>
+                          <p173:track id="{518BCEC2-F16D-45FD-94BC-BBB7F3EA724C}" label="English (captions)" lang="en-US" r:embed="rId7"/>
                         </p173:trackLst>
                       </p173:tracksInfo>
                     </p:ext>
@@ -13859,7 +13859,7 @@
         </p:blipFill>
         <p:spPr>
           <a:xfrm>
-            <a:off x="127000" y="6350000"/>
+            <a:off x="12446000" y="127000"/>
             <a:ext cx="304800" cy="304800"/>
           </a:xfrm>
           <a:prstGeom prst="rect">
@@ -15560,7 +15560,7 @@
             <a:hlinkClick r:id="" action="ppaction://media"/>
             <a:extLst>
               <a:ext uri="{FF2B5EF4-FFF2-40B4-BE49-F238E27FC236}">
-                <a16:creationId xmlns:a16="http://schemas.microsoft.com/office/drawing/2014/main" id="{217396E4-9B0A-F966-1B04-A3434E756699}"/>
+                <a16:creationId xmlns:a16="http://schemas.microsoft.com/office/drawing/2014/main" id="{89768142-88AE-7AD5-3568-76A8C8E9866F}"/>
               </a:ext>
             </a:extLst>
           </p:cNvPr>
@@ -15576,7 +15576,7 @@
                     <p:ext uri="{3AFAAA56-56D3-431D-BCD4-E75A35582382}">
                       <p173:tracksInfo xmlns:p173="http://schemas.microsoft.com/office/powerpoint/2017/3/main" displayLoc="slide">
                         <p173:trackLst>
-                          <p173:track id="{2730021B-CE52-4997-B60B-9F2529F3FA2D}" label="English (captions)" lang="en-US" r:embed="rId7"/>
+                          <p173:track id="{224E3437-085A-4045-8C67-2CEE8AABE45C}" label="English (captions)" lang="en-US" r:embed="rId7"/>
                         </p173:trackLst>
                       </p173:tracksInfo>
                     </p:ext>
@@ -15594,7 +15594,7 @@
         </p:blipFill>
         <p:spPr>
           <a:xfrm>
-            <a:off x="127000" y="6350000"/>
+            <a:off x="12446000" y="127000"/>
             <a:ext cx="304800" cy="304800"/>
           </a:xfrm>
           <a:prstGeom prst="rect">
@@ -16290,7 +16290,7 @@
             <a:hlinkClick r:id="" action="ppaction://media"/>
             <a:extLst>
               <a:ext uri="{FF2B5EF4-FFF2-40B4-BE49-F238E27FC236}">
-                <a16:creationId xmlns:a16="http://schemas.microsoft.com/office/drawing/2014/main" id="{44E9F9CE-EEF2-E9D1-3424-CF8016FC2013}"/>
+                <a16:creationId xmlns:a16="http://schemas.microsoft.com/office/drawing/2014/main" id="{C0B13EF0-2FAD-FAD5-4010-B82B0ADAF1AC}"/>
               </a:ext>
             </a:extLst>
           </p:cNvPr>
@@ -16306,7 +16306,7 @@
                     <p:ext uri="{3AFAAA56-56D3-431D-BCD4-E75A35582382}">
                       <p173:tracksInfo xmlns:p173="http://schemas.microsoft.com/office/powerpoint/2017/3/main" displayLoc="slide">
                         <p173:trackLst>
-                          <p173:track id="{49CB0932-C30E-4CD3-9958-7D9BC196ECD6}" label="English (captions)" lang="en-US" r:embed="rId7"/>
+                          <p173:track id="{9E68F2E2-3718-4DB8-AB51-8185D6CD86C8}" label="English (captions)" lang="en-US" r:embed="rId7"/>
                         </p173:trackLst>
                       </p173:tracksInfo>
                     </p:ext>
@@ -16324,7 +16324,7 @@
         </p:blipFill>
         <p:spPr>
           <a:xfrm>
-            <a:off x="127000" y="6350000"/>
+            <a:off x="12446000" y="127000"/>
             <a:ext cx="304800" cy="304800"/>
           </a:xfrm>
           <a:prstGeom prst="rect">
@@ -18010,7 +18010,7 @@
             <a:hlinkClick r:id="" action="ppaction://media"/>
             <a:extLst>
               <a:ext uri="{FF2B5EF4-FFF2-40B4-BE49-F238E27FC236}">
-                <a16:creationId xmlns:a16="http://schemas.microsoft.com/office/drawing/2014/main" id="{5153103D-B953-989A-71FC-B562084B1C65}"/>
+                <a16:creationId xmlns:a16="http://schemas.microsoft.com/office/drawing/2014/main" id="{3D47EE17-4A25-C107-93CD-3C8FCC2BDDDC}"/>
               </a:ext>
             </a:extLst>
           </p:cNvPr>
@@ -18026,7 +18026,7 @@
                     <p:ext uri="{3AFAAA56-56D3-431D-BCD4-E75A35582382}">
                       <p173:tracksInfo xmlns:p173="http://schemas.microsoft.com/office/powerpoint/2017/3/main" displayLoc="slide">
                         <p173:trackLst>
-                          <p173:track id="{3F29022E-B03A-4C6D-9A95-5621B5FEFC6A}" label="English (captions)" lang="en-US" r:embed="rId7"/>
+                          <p173:track id="{9C7CCAC3-0C8A-44B5-9B25-168120AC579D}" label="English (captions)" lang="en-US" r:embed="rId7"/>
                         </p173:trackLst>
                       </p173:tracksInfo>
                     </p:ext>
@@ -18044,7 +18044,7 @@
         </p:blipFill>
         <p:spPr>
           <a:xfrm>
-            <a:off x="127000" y="6350000"/>
+            <a:off x="12446000" y="127000"/>
             <a:ext cx="304800" cy="304800"/>
           </a:xfrm>
           <a:prstGeom prst="rect">
@@ -20227,7 +20227,7 @@
             <a:hlinkClick r:id="" action="ppaction://media"/>
             <a:extLst>
               <a:ext uri="{FF2B5EF4-FFF2-40B4-BE49-F238E27FC236}">
-                <a16:creationId xmlns:a16="http://schemas.microsoft.com/office/drawing/2014/main" id="{04E46658-8B6F-BF87-3681-EC9440B26741}"/>
+                <a16:creationId xmlns:a16="http://schemas.microsoft.com/office/drawing/2014/main" id="{BB18F02A-0C12-FB10-5A9D-E09537D680A2}"/>
               </a:ext>
             </a:extLst>
           </p:cNvPr>
@@ -20243,7 +20243,7 @@
                     <p:ext uri="{3AFAAA56-56D3-431D-BCD4-E75A35582382}">
                       <p173:tracksInfo xmlns:p173="http://schemas.microsoft.com/office/powerpoint/2017/3/main" displayLoc="slide">
                         <p173:trackLst>
-                          <p173:track id="{3E522654-9647-420B-9F12-47E2ADE92A7D}" label="English (captions)" lang="en-US" r:embed="rId7"/>
+                          <p173:track id="{93F343AF-F5DA-46F3-A866-55B303887F00}" label="English (captions)" lang="en-US" r:embed="rId7"/>
                         </p173:trackLst>
                       </p173:tracksInfo>
                     </p:ext>
@@ -20261,7 +20261,7 @@
         </p:blipFill>
         <p:spPr>
           <a:xfrm>
-            <a:off x="127000" y="6350000"/>
+            <a:off x="12446000" y="127000"/>
             <a:ext cx="304800" cy="304800"/>
           </a:xfrm>
           <a:prstGeom prst="rect">
@@ -22750,7 +22750,7 @@
             <a:hlinkClick r:id="" action="ppaction://media"/>
             <a:extLst>
               <a:ext uri="{FF2B5EF4-FFF2-40B4-BE49-F238E27FC236}">
-                <a16:creationId xmlns:a16="http://schemas.microsoft.com/office/drawing/2014/main" id="{2393EB72-538F-92DC-0339-805169A60586}"/>
+                <a16:creationId xmlns:a16="http://schemas.microsoft.com/office/drawing/2014/main" id="{425B797E-1232-0A94-6A5B-2A42C53E9947}"/>
               </a:ext>
             </a:extLst>
           </p:cNvPr>
@@ -22766,7 +22766,7 @@
                     <p:ext uri="{3AFAAA56-56D3-431D-BCD4-E75A35582382}">
                       <p173:tracksInfo xmlns:p173="http://schemas.microsoft.com/office/powerpoint/2017/3/main" displayLoc="slide">
                         <p173:trackLst>
-                          <p173:track id="{3342574F-081C-4254-936F-BA311B1E328A}" label="English (captions)" lang="en-US" r:embed="rId6"/>
+                          <p173:track id="{75822DE1-3522-436A-B986-FD6C465AB0FD}" label="English (captions)" lang="en-US" r:embed="rId6"/>
                         </p173:trackLst>
                       </p173:tracksInfo>
                     </p:ext>
@@ -22784,7 +22784,7 @@
         </p:blipFill>
         <p:spPr>
           <a:xfrm>
-            <a:off x="127000" y="6350000"/>
+            <a:off x="12446000" y="127000"/>
             <a:ext cx="304800" cy="304800"/>
           </a:xfrm>
           <a:prstGeom prst="rect">
@@ -25629,7 +25629,7 @@
             <a:hlinkClick r:id="" action="ppaction://media"/>
             <a:extLst>
               <a:ext uri="{FF2B5EF4-FFF2-40B4-BE49-F238E27FC236}">
-                <a16:creationId xmlns:a16="http://schemas.microsoft.com/office/drawing/2014/main" id="{EE2C139F-4538-B0ED-310B-790BBE14E876}"/>
+                <a16:creationId xmlns:a16="http://schemas.microsoft.com/office/drawing/2014/main" id="{9304C5A6-6FBB-90EE-711D-750105373B78}"/>
               </a:ext>
             </a:extLst>
           </p:cNvPr>
@@ -25645,7 +25645,7 @@
                     <p:ext uri="{3AFAAA56-56D3-431D-BCD4-E75A35582382}">
                       <p173:tracksInfo xmlns:p173="http://schemas.microsoft.com/office/powerpoint/2017/3/main" displayLoc="slide">
                         <p173:trackLst>
-                          <p173:track id="{2A3B6C43-910D-4BFB-AF73-AF22F298DE79}" label="English (captions)" lang="en-US" r:embed="rId6"/>
+                          <p173:track id="{CDDB0EBD-69EC-4815-B239-23BEAEF2450A}" label="English (captions)" lang="en-US" r:embed="rId6"/>
                         </p173:trackLst>
                       </p173:tracksInfo>
                     </p:ext>
@@ -25663,7 +25663,7 @@
         </p:blipFill>
         <p:spPr>
           <a:xfrm>
-            <a:off x="127000" y="6350000"/>
+            <a:off x="12446000" y="127000"/>
             <a:ext cx="304800" cy="304800"/>
           </a:xfrm>
           <a:prstGeom prst="rect">
@@ -28161,7 +28161,7 @@
             <a:hlinkClick r:id="" action="ppaction://media"/>
             <a:extLst>
               <a:ext uri="{FF2B5EF4-FFF2-40B4-BE49-F238E27FC236}">
-                <a16:creationId xmlns:a16="http://schemas.microsoft.com/office/drawing/2014/main" id="{84D9F26C-9099-B54A-A0C3-7EFDD752D9F3}"/>
+                <a16:creationId xmlns:a16="http://schemas.microsoft.com/office/drawing/2014/main" id="{A9B5BA63-A524-5677-92B6-0998E6B2F29A}"/>
               </a:ext>
             </a:extLst>
           </p:cNvPr>
@@ -28177,7 +28177,7 @@
                     <p:ext uri="{3AFAAA56-56D3-431D-BCD4-E75A35582382}">
                       <p173:tracksInfo xmlns:p173="http://schemas.microsoft.com/office/powerpoint/2017/3/main" displayLoc="slide">
                         <p173:trackLst>
-                          <p173:track id="{C324A4D4-766E-4F12-A11A-2F78D00DD055}" label="English (captions)" lang="en-US" r:embed="rId7"/>
+                          <p173:track id="{8021F8F8-897B-419E-818D-4D6782D31E45}" label="English (captions)" lang="en-US" r:embed="rId7"/>
                         </p173:trackLst>
                       </p173:tracksInfo>
                     </p:ext>
@@ -28195,7 +28195,7 @@
         </p:blipFill>
         <p:spPr>
           <a:xfrm>
-            <a:off x="127000" y="6350000"/>
+            <a:off x="12446000" y="127000"/>
             <a:ext cx="304800" cy="304800"/>
           </a:xfrm>
           <a:prstGeom prst="rect">
@@ -29999,7 +29999,7 @@
             <a:hlinkClick r:id="" action="ppaction://media"/>
             <a:extLst>
               <a:ext uri="{FF2B5EF4-FFF2-40B4-BE49-F238E27FC236}">
-                <a16:creationId xmlns:a16="http://schemas.microsoft.com/office/drawing/2014/main" id="{D997A95D-5766-A94B-B86E-8E21742A0F23}"/>
+                <a16:creationId xmlns:a16="http://schemas.microsoft.com/office/drawing/2014/main" id="{02096BE6-FFF0-A76C-6AB8-7BDAD179B973}"/>
               </a:ext>
             </a:extLst>
           </p:cNvPr>
@@ -30015,7 +30015,7 @@
                     <p:ext uri="{3AFAAA56-56D3-431D-BCD4-E75A35582382}">
                       <p173:tracksInfo xmlns:p173="http://schemas.microsoft.com/office/powerpoint/2017/3/main" displayLoc="slide">
                         <p173:trackLst>
-                          <p173:track id="{129E3F50-703B-40F6-991E-8B05A9C05CE3}" label="English (captions)" lang="en-US" r:embed="rId7"/>
+                          <p173:track id="{399745A4-0B77-4F89-9C15-C66A88B26461}" label="English (captions)" lang="en-US" r:embed="rId7"/>
                         </p173:trackLst>
                       </p173:tracksInfo>
                     </p:ext>
@@ -30033,7 +30033,7 @@
         </p:blipFill>
         <p:spPr>
           <a:xfrm>
-            <a:off x="127000" y="6350000"/>
+            <a:off x="12446000" y="127000"/>
             <a:ext cx="304800" cy="304800"/>
           </a:xfrm>
           <a:prstGeom prst="rect">
@@ -31997,7 +31997,7 @@
             <a:hlinkClick r:id="" action="ppaction://media"/>
             <a:extLst>
               <a:ext uri="{FF2B5EF4-FFF2-40B4-BE49-F238E27FC236}">
-                <a16:creationId xmlns:a16="http://schemas.microsoft.com/office/drawing/2014/main" id="{EF1AC7D8-67AE-C93E-F30E-FEAFDC1844E0}"/>
+                <a16:creationId xmlns:a16="http://schemas.microsoft.com/office/drawing/2014/main" id="{A7F2CBA8-D28B-7F4E-1C7B-AC68FD09E7F6}"/>
               </a:ext>
             </a:extLst>
           </p:cNvPr>
@@ -32013,7 +32013,7 @@
                     <p:ext uri="{3AFAAA56-56D3-431D-BCD4-E75A35582382}">
                       <p173:tracksInfo xmlns:p173="http://schemas.microsoft.com/office/powerpoint/2017/3/main" displayLoc="slide">
                         <p173:trackLst>
-                          <p173:track id="{E4C11BFD-8F1D-4BE1-84E2-DE53108E591E}" label="English (captions)" lang="en-US" r:embed="rId8"/>
+                          <p173:track id="{10B7A271-0542-4FA2-A268-DB5FE09F1EA1}" label="English (captions)" lang="en-US" r:embed="rId8"/>
                         </p173:trackLst>
                       </p173:tracksInfo>
                     </p:ext>
@@ -32031,7 +32031,7 @@
         </p:blipFill>
         <p:spPr>
           <a:xfrm>
-            <a:off x="127000" y="6350000"/>
+            <a:off x="12446000" y="127000"/>
             <a:ext cx="304800" cy="304800"/>
           </a:xfrm>
           <a:prstGeom prst="rect">
